--- a/cai-shioya-exercises.pptx
+++ b/cai-shioya-exercises.pptx
@@ -271,7 +271,7 @@
           <a:p>
             <a:fld id="{6F0D877F-F984-4AF8-9DD3-1EDD0240AB14}" type="datetimeFigureOut">
               <a:rPr kumimoji="1" lang="en-US" smtClean="0"/>
-              <a:t>7/24/2024</a:t>
+              <a:t>8/4/2025</a:t>
             </a:fld>
             <a:endParaRPr kumimoji="1" lang="en-US"/>
           </a:p>
@@ -448,7 +448,7 @@
           <a:p>
             <a:fld id="{BC56210E-A5EE-4707-8EFD-B2050EBAA0B3}" type="datetimeFigureOut">
               <a:rPr kumimoji="1" lang="ja-JP" altLang="en-US" smtClean="0"/>
-              <a:t>2024/7/24</a:t>
+              <a:t>2025/8/4</a:t>
             </a:fld>
             <a:endParaRPr kumimoji="1" lang="ja-JP" altLang="en-US"/>
           </a:p>
@@ -16813,7 +16813,7 @@
                 </a:solidFill>
                 <a:latin typeface="Consolas" panose="020B0609020204030204" pitchFamily="49" charset="0"/>
               </a:rPr>
-              <a:t>0x801</a:t>
+              <a:t>0x802</a:t>
             </a:r>
             <a:endParaRPr kumimoji="1" lang="ja-JP" altLang="en-US" sz="1400" b="1" dirty="0">
               <a:solidFill>
@@ -17522,7 +17522,7 @@
                 </a:solidFill>
                 <a:latin typeface="Consolas" panose="020B0609020204030204" pitchFamily="49" charset="0"/>
               </a:rPr>
-              <a:t>0x802</a:t>
+              <a:t>0x803</a:t>
             </a:r>
             <a:endParaRPr kumimoji="1" lang="ja-JP" altLang="en-US" sz="1400" dirty="0">
               <a:solidFill>
@@ -18174,7 +18174,7 @@
                 </a:solidFill>
                 <a:latin typeface="Consolas" panose="020B0609020204030204" pitchFamily="49" charset="0"/>
               </a:rPr>
-              <a:t>0x06</a:t>
+              <a:t>0x0A</a:t>
             </a:r>
             <a:endParaRPr kumimoji="1" lang="ja-JP" altLang="en-US" sz="1400" dirty="0">
               <a:solidFill>
@@ -18880,7 +18880,7 @@
                 </a:solidFill>
                 <a:latin typeface="Consolas" panose="020B0609020204030204" pitchFamily="49" charset="0"/>
               </a:rPr>
-              <a:t>0x07</a:t>
+              <a:t>0x0B</a:t>
             </a:r>
             <a:endParaRPr kumimoji="1" lang="ja-JP" altLang="en-US" sz="1400" dirty="0">
               <a:solidFill>
